--- a/metro/metro-s03-open-house-countdown.pptx
+++ b/metro/metro-s03-open-house-countdown.pptx
@@ -4262,9 +4262,9 @@
                 <a:solidFill>
                   <a:srgbClr val="14161A"/>
                 </a:solidFill>
-                <a:latin typeface="Space Grotesk"/>
-                <a:ea typeface="Space Grotesk"/>
-                <a:cs typeface="Space Grotesk"/>
+                <a:latin typeface="HK Grotesk"/>
+                <a:ea typeface="HK Grotesk"/>
+                <a:cs typeface="HK Grotesk"/>
               </a:rPr>
               <a:t>NO</a:t>
             </a:r>
@@ -4371,9 +4371,9 @@
                 <a:solidFill>
                   <a:srgbClr val="14161A"/>
                 </a:solidFill>
-                <a:latin typeface="Space Grotesk"/>
-                <a:ea typeface="Space Grotesk"/>
-                <a:cs typeface="Space Grotesk"/>
+                <a:latin typeface="HK Grotesk"/>
+                <a:ea typeface="HK Grotesk"/>
+                <a:cs typeface="HK Grotesk"/>
               </a:rPr>
               <a:t>Open House.</a:t>
             </a:r>
@@ -4410,9 +4410,9 @@
                 <a:solidFill>
                   <a:srgbClr val="14161A"/>
                 </a:solidFill>
-                <a:latin typeface="Space Grotesk"/>
-                <a:ea typeface="Space Grotesk"/>
-                <a:cs typeface="Space Grotesk"/>
+                <a:latin typeface="HK Grotesk"/>
+                <a:ea typeface="HK Grotesk"/>
+                <a:cs typeface="HK Grotesk"/>
               </a:rPr>
               <a:t>02</a:t>
             </a:r>
@@ -4484,9 +4484,9 @@
                 <a:solidFill>
                   <a:srgbClr val="14161A"/>
                 </a:solidFill>
-                <a:latin typeface="Space Grotesk"/>
-                <a:ea typeface="Space Grotesk"/>
-                <a:cs typeface="Space Grotesk"/>
+                <a:latin typeface="HK Grotesk"/>
+                <a:ea typeface="HK Grotesk"/>
+                <a:cs typeface="HK Grotesk"/>
               </a:rPr>
               <a:t>06</a:t>
             </a:r>
@@ -4558,9 +4558,9 @@
                 <a:solidFill>
                   <a:srgbClr val="14161A"/>
                 </a:solidFill>
-                <a:latin typeface="Space Grotesk"/>
-                <a:ea typeface="Space Grotesk"/>
-                <a:cs typeface="Space Grotesk"/>
+                <a:latin typeface="HK Grotesk"/>
+                <a:ea typeface="HK Grotesk"/>
+                <a:cs typeface="HK Grotesk"/>
               </a:rPr>
               <a:t>30</a:t>
             </a:r>
@@ -4663,9 +4663,9 @@
                 <a:solidFill>
                   <a:srgbClr val="14161A"/>
                 </a:solidFill>
-                <a:latin typeface="Space Grotesk"/>
-                <a:ea typeface="Space Grotesk"/>
-                <a:cs typeface="Space Grotesk"/>
+                <a:latin typeface="HK Grotesk"/>
+                <a:ea typeface="HK Grotesk"/>
+                <a:cs typeface="HK Grotesk"/>
               </a:rPr>
               <a:t>1200 N Wells, 14C</a:t>
             </a:r>
@@ -4698,9 +4698,9 @@
                 <a:solidFill>
                   <a:srgbClr val="8A8F99"/>
                 </a:solidFill>
-                <a:latin typeface="Space Grotesk"/>
-                <a:ea typeface="Space Grotesk"/>
-                <a:cs typeface="Space Grotesk"/>
+                <a:latin typeface="HK Grotesk"/>
+                <a:ea typeface="HK Grotesk"/>
+                <a:cs typeface="HK Grotesk"/>
               </a:rPr>
               <a:t>River North, Chicago</a:t>
             </a:r>
@@ -4733,9 +4733,9 @@
                 <a:solidFill>
                   <a:srgbClr val="2D5BE3"/>
                 </a:solidFill>
-                <a:latin typeface="Space Grotesk"/>
-                <a:ea typeface="Space Grotesk"/>
-                <a:cs typeface="Space Grotesk"/>
+                <a:latin typeface="HK Grotesk"/>
+                <a:ea typeface="HK Grotesk"/>
+                <a:cs typeface="HK Grotesk"/>
               </a:rPr>
               <a:t>Sunday · 12—3 PM</a:t>
             </a:r>
@@ -4768,9 +4768,9 @@
                 <a:solidFill>
                   <a:srgbClr val="14161A"/>
                 </a:solidFill>
-                <a:latin typeface="Space Grotesk"/>
-                <a:ea typeface="Space Grotesk"/>
-                <a:cs typeface="Space Grotesk"/>
+                <a:latin typeface="HK Grotesk"/>
+                <a:ea typeface="HK Grotesk"/>
+                <a:cs typeface="HK Grotesk"/>
               </a:rPr>
               <a:t>Save the date</a:t>
             </a:r>
@@ -4803,9 +4803,9 @@
                 <a:solidFill>
                   <a:srgbClr val="2D5BE3"/>
                 </a:solidFill>
-                <a:latin typeface="Space Grotesk"/>
-                <a:ea typeface="Space Grotesk"/>
-                <a:cs typeface="Space Grotesk"/>
+                <a:latin typeface="HK Grotesk"/>
+                <a:ea typeface="HK Grotesk"/>
+                <a:cs typeface="HK Grotesk"/>
               </a:rPr>
               <a:t>↗</a:t>
             </a:r>

--- a/metro/metro-s03-open-house-countdown.pptx
+++ b/metro/metro-s03-open-house-countdown.pptx
@@ -3316,8 +3316,8 @@
         </p:nvSpPr>
         <p:spPr>
           <a:xfrm>
-            <a:off x="762000" y="4697611"/>
-            <a:ext cx="2806601" cy="1838325"/>
+            <a:off x="762000" y="4792861"/>
+            <a:ext cx="2806601" cy="1914525"/>
           </a:xfrm>
           <a:prstGeom prst="rect">
             <a:avLst/>
@@ -3360,7 +3360,7 @@
         </p:nvSpPr>
         <p:spPr>
           <a:xfrm>
-            <a:off x="762000" y="4697611"/>
+            <a:off x="762000" y="4792861"/>
             <a:ext cx="2806601" cy="9525"/>
           </a:xfrm>
           <a:prstGeom prst="rect">
@@ -3404,7 +3404,7 @@
         </p:nvSpPr>
         <p:spPr>
           <a:xfrm>
-            <a:off x="762000" y="6526411"/>
+            <a:off x="762000" y="6697861"/>
             <a:ext cx="2806601" cy="9525"/>
           </a:xfrm>
           <a:prstGeom prst="rect">
@@ -3448,8 +3448,8 @@
         </p:nvSpPr>
         <p:spPr>
           <a:xfrm>
-            <a:off x="762000" y="4697611"/>
-            <a:ext cx="9525" cy="1838325"/>
+            <a:off x="762000" y="4792861"/>
+            <a:ext cx="9525" cy="1914525"/>
           </a:xfrm>
           <a:prstGeom prst="rect">
             <a:avLst/>
@@ -3492,8 +3492,8 @@
         </p:nvSpPr>
         <p:spPr>
           <a:xfrm>
-            <a:off x="3559076" y="4697611"/>
-            <a:ext cx="9525" cy="1838325"/>
+            <a:off x="3559076" y="4792861"/>
+            <a:ext cx="9525" cy="1914525"/>
           </a:xfrm>
           <a:prstGeom prst="rect">
             <a:avLst/>
@@ -3536,8 +3536,8 @@
         </p:nvSpPr>
         <p:spPr>
           <a:xfrm>
-            <a:off x="3740051" y="4697611"/>
-            <a:ext cx="2806750" cy="1838325"/>
+            <a:off x="3740051" y="4792861"/>
+            <a:ext cx="2806750" cy="1914525"/>
           </a:xfrm>
           <a:prstGeom prst="rect">
             <a:avLst/>
@@ -3580,7 +3580,7 @@
         </p:nvSpPr>
         <p:spPr>
           <a:xfrm>
-            <a:off x="3740051" y="4697611"/>
+            <a:off x="3740051" y="4792861"/>
             <a:ext cx="2806750" cy="9525"/>
           </a:xfrm>
           <a:prstGeom prst="rect">
@@ -3624,7 +3624,7 @@
         </p:nvSpPr>
         <p:spPr>
           <a:xfrm>
-            <a:off x="3740051" y="6526411"/>
+            <a:off x="3740051" y="6697861"/>
             <a:ext cx="2806750" cy="9525"/>
           </a:xfrm>
           <a:prstGeom prst="rect">
@@ -3668,8 +3668,8 @@
         </p:nvSpPr>
         <p:spPr>
           <a:xfrm>
-            <a:off x="3740051" y="4697611"/>
-            <a:ext cx="9525" cy="1838325"/>
+            <a:off x="3740051" y="4792861"/>
+            <a:ext cx="9525" cy="1914525"/>
           </a:xfrm>
           <a:prstGeom prst="rect">
             <a:avLst/>
@@ -3712,8 +3712,8 @@
         </p:nvSpPr>
         <p:spPr>
           <a:xfrm>
-            <a:off x="6537275" y="4697611"/>
-            <a:ext cx="9525" cy="1838325"/>
+            <a:off x="6537275" y="4792861"/>
+            <a:ext cx="9525" cy="1914525"/>
           </a:xfrm>
           <a:prstGeom prst="rect">
             <a:avLst/>
@@ -3756,8 +3756,8 @@
         </p:nvSpPr>
         <p:spPr>
           <a:xfrm>
-            <a:off x="6718250" y="4697611"/>
-            <a:ext cx="2806750" cy="1838325"/>
+            <a:off x="6718250" y="4792861"/>
+            <a:ext cx="2806750" cy="1914525"/>
           </a:xfrm>
           <a:prstGeom prst="rect">
             <a:avLst/>
@@ -3800,7 +3800,7 @@
         </p:nvSpPr>
         <p:spPr>
           <a:xfrm>
-            <a:off x="6718250" y="4697611"/>
+            <a:off x="6718250" y="4792861"/>
             <a:ext cx="2806750" cy="9525"/>
           </a:xfrm>
           <a:prstGeom prst="rect">
@@ -3844,7 +3844,7 @@
         </p:nvSpPr>
         <p:spPr>
           <a:xfrm>
-            <a:off x="6718250" y="6526411"/>
+            <a:off x="6718250" y="6697861"/>
             <a:ext cx="2806750" cy="9525"/>
           </a:xfrm>
           <a:prstGeom prst="rect">
@@ -3888,8 +3888,8 @@
         </p:nvSpPr>
         <p:spPr>
           <a:xfrm>
-            <a:off x="6718250" y="4697611"/>
-            <a:ext cx="9525" cy="1838325"/>
+            <a:off x="6718250" y="4792861"/>
+            <a:ext cx="9525" cy="1914525"/>
           </a:xfrm>
           <a:prstGeom prst="rect">
             <a:avLst/>
@@ -3932,8 +3932,8 @@
         </p:nvSpPr>
         <p:spPr>
           <a:xfrm>
-            <a:off x="9515475" y="4697611"/>
-            <a:ext cx="9525" cy="1838325"/>
+            <a:off x="9515475" y="4792861"/>
+            <a:ext cx="9525" cy="1914525"/>
           </a:xfrm>
           <a:prstGeom prst="rect">
             <a:avLst/>
@@ -3976,7 +3976,7 @@
         </p:nvSpPr>
         <p:spPr>
           <a:xfrm>
-            <a:off x="762000" y="7107436"/>
+            <a:off x="762000" y="7278886"/>
             <a:ext cx="8763000" cy="9525"/>
           </a:xfrm>
           <a:prstGeom prst="rect">
@@ -4020,7 +4020,7 @@
         </p:nvSpPr>
         <p:spPr>
           <a:xfrm>
-            <a:off x="762000" y="15735300"/>
+            <a:off x="762000" y="15525750"/>
             <a:ext cx="8763000" cy="9525"/>
           </a:xfrm>
           <a:prstGeom prst="rect">
@@ -4108,8 +4108,8 @@
         </p:nvSpPr>
         <p:spPr>
           <a:xfrm>
-            <a:off x="762000" y="15735300"/>
-            <a:ext cx="9525" cy="647700"/>
+            <a:off x="762000" y="15525750"/>
+            <a:ext cx="9525" cy="857250"/>
           </a:xfrm>
           <a:prstGeom prst="rect">
             <a:avLst/>
@@ -4152,8 +4152,8 @@
         </p:nvSpPr>
         <p:spPr>
           <a:xfrm>
-            <a:off x="9515475" y="15735300"/>
-            <a:ext cx="9525" cy="647700"/>
+            <a:off x="9515475" y="15525750"/>
+            <a:ext cx="9525" cy="857250"/>
           </a:xfrm>
           <a:prstGeom prst="rect">
             <a:avLst/>
@@ -4196,7 +4196,7 @@
         </p:nvSpPr>
         <p:spPr>
           <a:xfrm>
-            <a:off x="1024416" y="16012004"/>
+            <a:off x="1081566" y="15907229"/>
             <a:ext cx="94293" cy="94292"/>
           </a:xfrm>
           <a:prstGeom prst="rect">
@@ -4262,9 +4262,9 @@
                 <a:solidFill>
                   <a:srgbClr val="14161A"/>
                 </a:solidFill>
-                <a:latin typeface="HK Grotesk"/>
-                <a:ea typeface="HK Grotesk"/>
-                <a:cs typeface="HK Grotesk"/>
+                <a:latin typeface="Space Grotesk"/>
+                <a:ea typeface="Space Grotesk"/>
+                <a:cs typeface="Space Grotesk"/>
               </a:rPr>
               <a:t>NO</a:t>
             </a:r>
@@ -4279,8 +4279,8 @@
         </p:nvSpPr>
         <p:spPr>
           <a:xfrm>
-            <a:off x="7680573" y="938212"/>
-            <a:ext cx="3332083" cy="104775"/>
+            <a:off x="6574036" y="900112"/>
+            <a:ext cx="5102542" cy="180975"/>
           </a:xfrm>
           <a:prstGeom prst="rect">
             <a:avLst/>
@@ -4293,7 +4293,7 @@
           <a:p>
             <a:pPr algn="l"/>
             <a:r>
-              <a:rPr sz="750" i="0" b="0" spc="240">
+              <a:rPr sz="1200" i="0" b="0" spc="384">
                 <a:solidFill>
                   <a:srgbClr val="8A8F99"/>
                 </a:solidFill>
@@ -4315,7 +4315,7 @@
         <p:spPr>
           <a:xfrm>
             <a:off x="762000" y="2857500"/>
-            <a:ext cx="14401800" cy="133350"/>
+            <a:ext cx="14401800" cy="228600"/>
           </a:xfrm>
           <a:prstGeom prst="rect">
             <a:avLst/>
@@ -4328,7 +4328,7 @@
           <a:p>
             <a:pPr algn="l"/>
             <a:r>
-              <a:rPr sz="900" i="0" b="0" spc="324">
+              <a:rPr sz="1575" i="0" b="0" spc="472">
                 <a:solidFill>
                   <a:srgbClr val="2D5BE3"/>
                 </a:solidFill>
@@ -4349,7 +4349,7 @@
         </p:nvSpPr>
         <p:spPr>
           <a:xfrm>
-            <a:off x="762000" y="3162300"/>
+            <a:off x="762000" y="3257550"/>
             <a:ext cx="14401800" cy="963811"/>
           </a:xfrm>
           <a:prstGeom prst="rect">
@@ -4371,9 +4371,9 @@
                 <a:solidFill>
                   <a:srgbClr val="14161A"/>
                 </a:solidFill>
-                <a:latin typeface="HK Grotesk"/>
-                <a:ea typeface="HK Grotesk"/>
-                <a:cs typeface="HK Grotesk"/>
+                <a:latin typeface="Space Grotesk"/>
+                <a:ea typeface="Space Grotesk"/>
+                <a:cs typeface="Space Grotesk"/>
               </a:rPr>
               <a:t>Open House.</a:t>
             </a:r>
@@ -4388,7 +4388,7 @@
         </p:nvSpPr>
         <p:spPr>
           <a:xfrm>
-            <a:off x="-255240" y="4992886"/>
+            <a:off x="-255240" y="5088136"/>
             <a:ext cx="4841081" cy="1028700"/>
           </a:xfrm>
           <a:prstGeom prst="rect">
@@ -4410,9 +4410,9 @@
                 <a:solidFill>
                   <a:srgbClr val="14161A"/>
                 </a:solidFill>
-                <a:latin typeface="HK Grotesk"/>
-                <a:ea typeface="HK Grotesk"/>
-                <a:cs typeface="HK Grotesk"/>
+                <a:latin typeface="Space Grotesk"/>
+                <a:ea typeface="Space Grotesk"/>
+                <a:cs typeface="Space Grotesk"/>
               </a:rPr>
               <a:t>02</a:t>
             </a:r>
@@ -4427,8 +4427,8 @@
         </p:nvSpPr>
         <p:spPr>
           <a:xfrm>
-            <a:off x="-255240" y="6135886"/>
-            <a:ext cx="4841081" cy="104775"/>
+            <a:off x="-255240" y="6231136"/>
+            <a:ext cx="4841081" cy="180975"/>
           </a:xfrm>
           <a:prstGeom prst="rect">
             <a:avLst/>
@@ -4441,7 +4441,7 @@
           <a:p>
             <a:pPr algn="ctr"/>
             <a:r>
-              <a:rPr sz="750" i="0" b="0" spc="240">
+              <a:rPr sz="1200" i="0" b="0" spc="384">
                 <a:solidFill>
                   <a:srgbClr val="2D5BE3"/>
                 </a:solidFill>
@@ -4462,7 +4462,7 @@
         </p:nvSpPr>
         <p:spPr>
           <a:xfrm>
-            <a:off x="2722766" y="4992886"/>
+            <a:off x="2722766" y="5088136"/>
             <a:ext cx="4841319" cy="1028700"/>
           </a:xfrm>
           <a:prstGeom prst="rect">
@@ -4484,9 +4484,9 @@
                 <a:solidFill>
                   <a:srgbClr val="14161A"/>
                 </a:solidFill>
-                <a:latin typeface="HK Grotesk"/>
-                <a:ea typeface="HK Grotesk"/>
-                <a:cs typeface="HK Grotesk"/>
+                <a:latin typeface="Space Grotesk"/>
+                <a:ea typeface="Space Grotesk"/>
+                <a:cs typeface="Space Grotesk"/>
               </a:rPr>
               <a:t>06</a:t>
             </a:r>
@@ -4501,8 +4501,8 @@
         </p:nvSpPr>
         <p:spPr>
           <a:xfrm>
-            <a:off x="2722766" y="6135886"/>
-            <a:ext cx="4841319" cy="104775"/>
+            <a:off x="2722766" y="6231136"/>
+            <a:ext cx="4841319" cy="180975"/>
           </a:xfrm>
           <a:prstGeom prst="rect">
             <a:avLst/>
@@ -4515,7 +4515,7 @@
           <a:p>
             <a:pPr algn="ctr"/>
             <a:r>
-              <a:rPr sz="750" i="0" b="0" spc="240">
+              <a:rPr sz="1200" i="0" b="0" spc="384">
                 <a:solidFill>
                   <a:srgbClr val="2D5BE3"/>
                 </a:solidFill>
@@ -4536,7 +4536,7 @@
         </p:nvSpPr>
         <p:spPr>
           <a:xfrm>
-            <a:off x="5700966" y="4992886"/>
+            <a:off x="5700966" y="5088136"/>
             <a:ext cx="4841319" cy="1028700"/>
           </a:xfrm>
           <a:prstGeom prst="rect">
@@ -4558,9 +4558,9 @@
                 <a:solidFill>
                   <a:srgbClr val="14161A"/>
                 </a:solidFill>
-                <a:latin typeface="HK Grotesk"/>
-                <a:ea typeface="HK Grotesk"/>
-                <a:cs typeface="HK Grotesk"/>
+                <a:latin typeface="Space Grotesk"/>
+                <a:ea typeface="Space Grotesk"/>
+                <a:cs typeface="Space Grotesk"/>
               </a:rPr>
               <a:t>30</a:t>
             </a:r>
@@ -4575,8 +4575,8 @@
         </p:nvSpPr>
         <p:spPr>
           <a:xfrm>
-            <a:off x="5700966" y="6135886"/>
-            <a:ext cx="4841319" cy="104775"/>
+            <a:off x="5700966" y="6231136"/>
+            <a:ext cx="4841319" cy="180975"/>
           </a:xfrm>
           <a:prstGeom prst="rect">
             <a:avLst/>
@@ -4589,7 +4589,7 @@
           <a:p>
             <a:pPr algn="ctr"/>
             <a:r>
-              <a:rPr sz="750" i="0" b="0" spc="240">
+              <a:rPr sz="1200" i="0" b="0" spc="384">
                 <a:solidFill>
                   <a:srgbClr val="2D5BE3"/>
                 </a:solidFill>
@@ -4610,8 +4610,8 @@
         </p:nvSpPr>
         <p:spPr>
           <a:xfrm>
-            <a:off x="762000" y="7440811"/>
-            <a:ext cx="14401800" cy="104775"/>
+            <a:off x="762000" y="7612261"/>
+            <a:ext cx="14401800" cy="180975"/>
           </a:xfrm>
           <a:prstGeom prst="rect">
             <a:avLst/>
@@ -4624,7 +4624,7 @@
           <a:p>
             <a:pPr algn="l"/>
             <a:r>
-              <a:rPr sz="750" i="0" b="0" spc="240">
+              <a:rPr sz="1200" i="0" b="0" spc="384">
                 <a:solidFill>
                   <a:srgbClr val="8A8F99"/>
                 </a:solidFill>
@@ -4645,7 +4645,7 @@
         </p:nvSpPr>
         <p:spPr>
           <a:xfrm>
-            <a:off x="762000" y="7659886"/>
+            <a:off x="762000" y="7907536"/>
             <a:ext cx="14401800" cy="476250"/>
           </a:xfrm>
           <a:prstGeom prst="rect">
@@ -4663,9 +4663,9 @@
                 <a:solidFill>
                   <a:srgbClr val="14161A"/>
                 </a:solidFill>
-                <a:latin typeface="HK Grotesk"/>
-                <a:ea typeface="HK Grotesk"/>
-                <a:cs typeface="HK Grotesk"/>
+                <a:latin typeface="Space Grotesk"/>
+                <a:ea typeface="Space Grotesk"/>
+                <a:cs typeface="Space Grotesk"/>
               </a:rPr>
               <a:t>1200 N Wells, 14C</a:t>
             </a:r>
@@ -4680,7 +4680,7 @@
         </p:nvSpPr>
         <p:spPr>
           <a:xfrm>
-            <a:off x="762000" y="8212336"/>
+            <a:off x="762000" y="8459986"/>
             <a:ext cx="14401800" cy="171450"/>
           </a:xfrm>
           <a:prstGeom prst="rect">
@@ -4698,9 +4698,9 @@
                 <a:solidFill>
                   <a:srgbClr val="8A8F99"/>
                 </a:solidFill>
-                <a:latin typeface="HK Grotesk"/>
-                <a:ea typeface="HK Grotesk"/>
-                <a:cs typeface="HK Grotesk"/>
+                <a:latin typeface="Space Grotesk"/>
+                <a:ea typeface="Space Grotesk"/>
+                <a:cs typeface="Space Grotesk"/>
               </a:rPr>
               <a:t>River North, Chicago</a:t>
             </a:r>
@@ -4715,7 +4715,7 @@
         </p:nvSpPr>
         <p:spPr>
           <a:xfrm>
-            <a:off x="762000" y="8555236"/>
+            <a:off x="762000" y="8802886"/>
             <a:ext cx="14401800" cy="304800"/>
           </a:xfrm>
           <a:prstGeom prst="rect">
@@ -4733,9 +4733,9 @@
                 <a:solidFill>
                   <a:srgbClr val="2D5BE3"/>
                 </a:solidFill>
-                <a:latin typeface="HK Grotesk"/>
-                <a:ea typeface="HK Grotesk"/>
-                <a:cs typeface="HK Grotesk"/>
+                <a:latin typeface="Space Grotesk"/>
+                <a:ea typeface="Space Grotesk"/>
+                <a:cs typeface="Space Grotesk"/>
               </a:rPr>
               <a:t>Sunday · 12—3 PM</a:t>
             </a:r>
@@ -4750,8 +4750,8 @@
         </p:nvSpPr>
         <p:spPr>
           <a:xfrm>
-            <a:off x="1238250" y="15978188"/>
-            <a:ext cx="1914287" cy="161925"/>
+            <a:off x="1314450" y="15825788"/>
+            <a:ext cx="2732246" cy="257175"/>
           </a:xfrm>
           <a:prstGeom prst="rect">
             <a:avLst/>
@@ -4764,13 +4764,13 @@
           <a:p>
             <a:pPr algn="l"/>
             <a:r>
-              <a:rPr sz="1125" i="0" b="1" spc="22">
+              <a:rPr sz="1725" i="0" b="1" spc="34">
                 <a:solidFill>
                   <a:srgbClr val="14161A"/>
                 </a:solidFill>
-                <a:latin typeface="HK Grotesk"/>
-                <a:ea typeface="HK Grotesk"/>
-                <a:cs typeface="HK Grotesk"/>
+                <a:latin typeface="Space Grotesk"/>
+                <a:ea typeface="Space Grotesk"/>
+                <a:cs typeface="Space Grotesk"/>
               </a:rPr>
               <a:t>Save the date</a:t>
             </a:r>
@@ -4785,8 +4785,8 @@
         </p:nvSpPr>
         <p:spPr>
           <a:xfrm>
-            <a:off x="9105900" y="15954375"/>
-            <a:ext cx="609600" cy="209550"/>
+            <a:off x="9001125" y="15821025"/>
+            <a:ext cx="685800" cy="266700"/>
           </a:xfrm>
           <a:prstGeom prst="rect">
             <a:avLst/>
@@ -4799,13 +4799,13 @@
           <a:p>
             <a:pPr algn="l"/>
             <a:r>
-              <a:rPr sz="1350" i="0" b="0">
+              <a:rPr sz="1800" i="0" b="0">
                 <a:solidFill>
                   <a:srgbClr val="2D5BE3"/>
                 </a:solidFill>
-                <a:latin typeface="HK Grotesk"/>
-                <a:ea typeface="HK Grotesk"/>
-                <a:cs typeface="HK Grotesk"/>
+                <a:latin typeface="Space Grotesk"/>
+                <a:ea typeface="Space Grotesk"/>
+                <a:cs typeface="Space Grotesk"/>
               </a:rPr>
               <a:t>↗</a:t>
             </a:r>
@@ -4820,8 +4820,8 @@
         </p:nvSpPr>
         <p:spPr>
           <a:xfrm>
-            <a:off x="2557031" y="17297400"/>
-            <a:ext cx="5172789" cy="123825"/>
+            <a:off x="1468041" y="17249775"/>
+            <a:ext cx="7350919" cy="180975"/>
           </a:xfrm>
           <a:prstGeom prst="rect">
             <a:avLst/>
@@ -4834,7 +4834,7 @@
           <a:p>
             <a:pPr algn="ctr"/>
             <a:r>
-              <a:rPr sz="825" i="0" b="0" spc="264">
+              <a:rPr sz="1200" i="0" b="0" spc="384">
                 <a:solidFill>
                   <a:srgbClr val="8A8F99"/>
                 </a:solidFill>

--- a/metro/metro-s03-open-house-countdown.pptx
+++ b/metro/metro-s03-open-house-countdown.pptx
@@ -3316,8 +3316,8 @@
         </p:nvSpPr>
         <p:spPr>
           <a:xfrm>
-            <a:off x="762000" y="4792861"/>
-            <a:ext cx="2806601" cy="1914525"/>
+            <a:off x="762000" y="4802386"/>
+            <a:ext cx="2806601" cy="1943100"/>
           </a:xfrm>
           <a:prstGeom prst="rect">
             <a:avLst/>
@@ -3360,7 +3360,7 @@
         </p:nvSpPr>
         <p:spPr>
           <a:xfrm>
-            <a:off x="762000" y="4792861"/>
+            <a:off x="762000" y="4802386"/>
             <a:ext cx="2806601" cy="9525"/>
           </a:xfrm>
           <a:prstGeom prst="rect">
@@ -3404,7 +3404,7 @@
         </p:nvSpPr>
         <p:spPr>
           <a:xfrm>
-            <a:off x="762000" y="6697861"/>
+            <a:off x="762000" y="6735961"/>
             <a:ext cx="2806601" cy="9525"/>
           </a:xfrm>
           <a:prstGeom prst="rect">
@@ -3448,8 +3448,8 @@
         </p:nvSpPr>
         <p:spPr>
           <a:xfrm>
-            <a:off x="762000" y="4792861"/>
-            <a:ext cx="9525" cy="1914525"/>
+            <a:off x="762000" y="4802386"/>
+            <a:ext cx="9525" cy="1943100"/>
           </a:xfrm>
           <a:prstGeom prst="rect">
             <a:avLst/>
@@ -3492,8 +3492,8 @@
         </p:nvSpPr>
         <p:spPr>
           <a:xfrm>
-            <a:off x="3559076" y="4792861"/>
-            <a:ext cx="9525" cy="1914525"/>
+            <a:off x="3559076" y="4802386"/>
+            <a:ext cx="9525" cy="1943100"/>
           </a:xfrm>
           <a:prstGeom prst="rect">
             <a:avLst/>
@@ -3536,8 +3536,8 @@
         </p:nvSpPr>
         <p:spPr>
           <a:xfrm>
-            <a:off x="3740051" y="4792861"/>
-            <a:ext cx="2806750" cy="1914525"/>
+            <a:off x="3740051" y="4802386"/>
+            <a:ext cx="2806750" cy="1943100"/>
           </a:xfrm>
           <a:prstGeom prst="rect">
             <a:avLst/>
@@ -3580,7 +3580,7 @@
         </p:nvSpPr>
         <p:spPr>
           <a:xfrm>
-            <a:off x="3740051" y="4792861"/>
+            <a:off x="3740051" y="4802386"/>
             <a:ext cx="2806750" cy="9525"/>
           </a:xfrm>
           <a:prstGeom prst="rect">
@@ -3624,7 +3624,7 @@
         </p:nvSpPr>
         <p:spPr>
           <a:xfrm>
-            <a:off x="3740051" y="6697861"/>
+            <a:off x="3740051" y="6735961"/>
             <a:ext cx="2806750" cy="9525"/>
           </a:xfrm>
           <a:prstGeom prst="rect">
@@ -3668,8 +3668,8 @@
         </p:nvSpPr>
         <p:spPr>
           <a:xfrm>
-            <a:off x="3740051" y="4792861"/>
-            <a:ext cx="9525" cy="1914525"/>
+            <a:off x="3740051" y="4802386"/>
+            <a:ext cx="9525" cy="1943100"/>
           </a:xfrm>
           <a:prstGeom prst="rect">
             <a:avLst/>
@@ -3712,8 +3712,8 @@
         </p:nvSpPr>
         <p:spPr>
           <a:xfrm>
-            <a:off x="6537275" y="4792861"/>
-            <a:ext cx="9525" cy="1914525"/>
+            <a:off x="6537275" y="4802386"/>
+            <a:ext cx="9525" cy="1943100"/>
           </a:xfrm>
           <a:prstGeom prst="rect">
             <a:avLst/>
@@ -3756,8 +3756,8 @@
         </p:nvSpPr>
         <p:spPr>
           <a:xfrm>
-            <a:off x="6718250" y="4792861"/>
-            <a:ext cx="2806750" cy="1914525"/>
+            <a:off x="6718250" y="4802386"/>
+            <a:ext cx="2806750" cy="1943100"/>
           </a:xfrm>
           <a:prstGeom prst="rect">
             <a:avLst/>
@@ -3800,7 +3800,7 @@
         </p:nvSpPr>
         <p:spPr>
           <a:xfrm>
-            <a:off x="6718250" y="4792861"/>
+            <a:off x="6718250" y="4802386"/>
             <a:ext cx="2806750" cy="9525"/>
           </a:xfrm>
           <a:prstGeom prst="rect">
@@ -3844,7 +3844,7 @@
         </p:nvSpPr>
         <p:spPr>
           <a:xfrm>
-            <a:off x="6718250" y="6697861"/>
+            <a:off x="6718250" y="6735961"/>
             <a:ext cx="2806750" cy="9525"/>
           </a:xfrm>
           <a:prstGeom prst="rect">
@@ -3888,8 +3888,8 @@
         </p:nvSpPr>
         <p:spPr>
           <a:xfrm>
-            <a:off x="6718250" y="4792861"/>
-            <a:ext cx="9525" cy="1914525"/>
+            <a:off x="6718250" y="4802386"/>
+            <a:ext cx="9525" cy="1943100"/>
           </a:xfrm>
           <a:prstGeom prst="rect">
             <a:avLst/>
@@ -3932,8 +3932,8 @@
         </p:nvSpPr>
         <p:spPr>
           <a:xfrm>
-            <a:off x="9515475" y="4792861"/>
-            <a:ext cx="9525" cy="1914525"/>
+            <a:off x="9515475" y="4802386"/>
+            <a:ext cx="9525" cy="1943100"/>
           </a:xfrm>
           <a:prstGeom prst="rect">
             <a:avLst/>
@@ -3976,7 +3976,7 @@
         </p:nvSpPr>
         <p:spPr>
           <a:xfrm>
-            <a:off x="762000" y="7278886"/>
+            <a:off x="762000" y="7316986"/>
             <a:ext cx="8763000" cy="9525"/>
           </a:xfrm>
           <a:prstGeom prst="rect">
@@ -4020,7 +4020,7 @@
         </p:nvSpPr>
         <p:spPr>
           <a:xfrm>
-            <a:off x="762000" y="15525750"/>
+            <a:off x="762000" y="15478125"/>
             <a:ext cx="8763000" cy="9525"/>
           </a:xfrm>
           <a:prstGeom prst="rect">
@@ -4108,8 +4108,8 @@
         </p:nvSpPr>
         <p:spPr>
           <a:xfrm>
-            <a:off x="762000" y="15525750"/>
-            <a:ext cx="9525" cy="857250"/>
+            <a:off x="762000" y="15478125"/>
+            <a:ext cx="9525" cy="904875"/>
           </a:xfrm>
           <a:prstGeom prst="rect">
             <a:avLst/>
@@ -4152,8 +4152,8 @@
         </p:nvSpPr>
         <p:spPr>
           <a:xfrm>
-            <a:off x="9515475" y="15525750"/>
-            <a:ext cx="9525" cy="857250"/>
+            <a:off x="9515475" y="15478125"/>
+            <a:ext cx="9525" cy="904875"/>
           </a:xfrm>
           <a:prstGeom prst="rect">
             <a:avLst/>
@@ -4196,7 +4196,7 @@
         </p:nvSpPr>
         <p:spPr>
           <a:xfrm>
-            <a:off x="1081566" y="15907229"/>
+            <a:off x="1081566" y="15883417"/>
             <a:ext cx="94293" cy="94292"/>
           </a:xfrm>
           <a:prstGeom prst="rect">
@@ -4240,8 +4240,8 @@
         </p:nvSpPr>
         <p:spPr>
           <a:xfrm>
-            <a:off x="873175" y="914400"/>
-            <a:ext cx="756523" cy="152400"/>
+            <a:off x="851148" y="900112"/>
+            <a:ext cx="827008" cy="180975"/>
           </a:xfrm>
           <a:prstGeom prst="rect">
             <a:avLst/>
@@ -4258,7 +4258,7 @@
               </a:lnSpc>
             </a:pPr>
             <a:r>
-              <a:rPr sz="1200" i="0" b="1" spc="24">
+              <a:rPr sz="1425" i="0" b="1" spc="28">
                 <a:solidFill>
                   <a:srgbClr val="14161A"/>
                 </a:solidFill>
@@ -4279,8 +4279,8 @@
         </p:nvSpPr>
         <p:spPr>
           <a:xfrm>
-            <a:off x="6574036" y="900112"/>
-            <a:ext cx="5102542" cy="180975"/>
+            <a:off x="6020693" y="885825"/>
+            <a:ext cx="5987891" cy="209550"/>
           </a:xfrm>
           <a:prstGeom prst="rect">
             <a:avLst/>
@@ -4293,7 +4293,7 @@
           <a:p>
             <a:pPr algn="l"/>
             <a:r>
-              <a:rPr sz="1200" i="0" b="0" spc="384">
+              <a:rPr sz="1425" i="0" b="0" spc="456">
                 <a:solidFill>
                   <a:srgbClr val="8A8F99"/>
                 </a:solidFill>
@@ -4315,7 +4315,7 @@
         <p:spPr>
           <a:xfrm>
             <a:off x="762000" y="2857500"/>
-            <a:ext cx="14401800" cy="228600"/>
+            <a:ext cx="14401800" cy="238125"/>
           </a:xfrm>
           <a:prstGeom prst="rect">
             <a:avLst/>
@@ -4328,7 +4328,7 @@
           <a:p>
             <a:pPr algn="l"/>
             <a:r>
-              <a:rPr sz="1575" i="0" b="0" spc="472">
+              <a:rPr sz="1650" i="0" b="0" spc="462">
                 <a:solidFill>
                   <a:srgbClr val="2D5BE3"/>
                 </a:solidFill>
@@ -4349,7 +4349,7 @@
         </p:nvSpPr>
         <p:spPr>
           <a:xfrm>
-            <a:off x="762000" y="3257550"/>
+            <a:off x="762000" y="3267075"/>
             <a:ext cx="14401800" cy="963811"/>
           </a:xfrm>
           <a:prstGeom prst="rect">
@@ -4388,7 +4388,7 @@
         </p:nvSpPr>
         <p:spPr>
           <a:xfrm>
-            <a:off x="-255240" y="5088136"/>
+            <a:off x="-255240" y="5097661"/>
             <a:ext cx="4841081" cy="1028700"/>
           </a:xfrm>
           <a:prstGeom prst="rect">
@@ -4427,8 +4427,8 @@
         </p:nvSpPr>
         <p:spPr>
           <a:xfrm>
-            <a:off x="-255240" y="6231136"/>
-            <a:ext cx="4841081" cy="180975"/>
+            <a:off x="-255240" y="6240661"/>
+            <a:ext cx="4841081" cy="209550"/>
           </a:xfrm>
           <a:prstGeom prst="rect">
             <a:avLst/>
@@ -4441,7 +4441,7 @@
           <a:p>
             <a:pPr algn="ctr"/>
             <a:r>
-              <a:rPr sz="1200" i="0" b="0" spc="384">
+              <a:rPr sz="1425" i="0" b="0" spc="456">
                 <a:solidFill>
                   <a:srgbClr val="2D5BE3"/>
                 </a:solidFill>
@@ -4462,7 +4462,7 @@
         </p:nvSpPr>
         <p:spPr>
           <a:xfrm>
-            <a:off x="2722766" y="5088136"/>
+            <a:off x="2722766" y="5097661"/>
             <a:ext cx="4841319" cy="1028700"/>
           </a:xfrm>
           <a:prstGeom prst="rect">
@@ -4501,8 +4501,8 @@
         </p:nvSpPr>
         <p:spPr>
           <a:xfrm>
-            <a:off x="2722766" y="6231136"/>
-            <a:ext cx="4841319" cy="180975"/>
+            <a:off x="2722766" y="6240661"/>
+            <a:ext cx="4841319" cy="209550"/>
           </a:xfrm>
           <a:prstGeom prst="rect">
             <a:avLst/>
@@ -4515,7 +4515,7 @@
           <a:p>
             <a:pPr algn="ctr"/>
             <a:r>
-              <a:rPr sz="1200" i="0" b="0" spc="384">
+              <a:rPr sz="1425" i="0" b="0" spc="456">
                 <a:solidFill>
                   <a:srgbClr val="2D5BE3"/>
                 </a:solidFill>
@@ -4536,7 +4536,7 @@
         </p:nvSpPr>
         <p:spPr>
           <a:xfrm>
-            <a:off x="5700966" y="5088136"/>
+            <a:off x="5700966" y="5097661"/>
             <a:ext cx="4841319" cy="1028700"/>
           </a:xfrm>
           <a:prstGeom prst="rect">
@@ -4575,8 +4575,8 @@
         </p:nvSpPr>
         <p:spPr>
           <a:xfrm>
-            <a:off x="5700966" y="6231136"/>
-            <a:ext cx="4841319" cy="180975"/>
+            <a:off x="5700966" y="6240661"/>
+            <a:ext cx="4841319" cy="209550"/>
           </a:xfrm>
           <a:prstGeom prst="rect">
             <a:avLst/>
@@ -4589,7 +4589,7 @@
           <a:p>
             <a:pPr algn="ctr"/>
             <a:r>
-              <a:rPr sz="1200" i="0" b="0" spc="384">
+              <a:rPr sz="1425" i="0" b="0" spc="456">
                 <a:solidFill>
                   <a:srgbClr val="2D5BE3"/>
                 </a:solidFill>
@@ -4610,8 +4610,8 @@
         </p:nvSpPr>
         <p:spPr>
           <a:xfrm>
-            <a:off x="762000" y="7612261"/>
-            <a:ext cx="14401800" cy="180975"/>
+            <a:off x="762000" y="7650361"/>
+            <a:ext cx="14401800" cy="209550"/>
           </a:xfrm>
           <a:prstGeom prst="rect">
             <a:avLst/>
@@ -4624,7 +4624,7 @@
           <a:p>
             <a:pPr algn="l"/>
             <a:r>
-              <a:rPr sz="1200" i="0" b="0" spc="384">
+              <a:rPr sz="1425" i="0" b="0" spc="456">
                 <a:solidFill>
                   <a:srgbClr val="8A8F99"/>
                 </a:solidFill>
@@ -4645,7 +4645,7 @@
         </p:nvSpPr>
         <p:spPr>
           <a:xfrm>
-            <a:off x="762000" y="7907536"/>
+            <a:off x="762000" y="7974211"/>
             <a:ext cx="14401800" cy="476250"/>
           </a:xfrm>
           <a:prstGeom prst="rect">
@@ -4680,8 +4680,8 @@
         </p:nvSpPr>
         <p:spPr>
           <a:xfrm>
-            <a:off x="762000" y="8459986"/>
-            <a:ext cx="14401800" cy="171450"/>
+            <a:off x="762000" y="8526661"/>
+            <a:ext cx="14401800" cy="219075"/>
           </a:xfrm>
           <a:prstGeom prst="rect">
             <a:avLst/>
@@ -4694,7 +4694,7 @@
           <a:p>
             <a:pPr algn="l"/>
             <a:r>
-              <a:rPr sz="1200" i="0" b="0">
+              <a:rPr sz="1500" i="0" b="0">
                 <a:solidFill>
                   <a:srgbClr val="8A8F99"/>
                 </a:solidFill>
@@ -4715,7 +4715,7 @@
         </p:nvSpPr>
         <p:spPr>
           <a:xfrm>
-            <a:off x="762000" y="8802886"/>
+            <a:off x="762000" y="8917186"/>
             <a:ext cx="14401800" cy="304800"/>
           </a:xfrm>
           <a:prstGeom prst="rect">
@@ -4750,8 +4750,8 @@
         </p:nvSpPr>
         <p:spPr>
           <a:xfrm>
-            <a:off x="1314450" y="15825788"/>
-            <a:ext cx="2732246" cy="257175"/>
+            <a:off x="1314450" y="15782925"/>
+            <a:ext cx="3141107" cy="295275"/>
           </a:xfrm>
           <a:prstGeom prst="rect">
             <a:avLst/>
@@ -4764,7 +4764,7 @@
           <a:p>
             <a:pPr algn="l"/>
             <a:r>
-              <a:rPr sz="1725" i="0" b="1" spc="34">
+              <a:rPr sz="2025" i="0" b="1" spc="40">
                 <a:solidFill>
                   <a:srgbClr val="14161A"/>
                 </a:solidFill>
@@ -4785,8 +4785,8 @@
         </p:nvSpPr>
         <p:spPr>
           <a:xfrm>
-            <a:off x="9001125" y="15821025"/>
-            <a:ext cx="685800" cy="266700"/>
+            <a:off x="8972550" y="15773400"/>
+            <a:ext cx="731520" cy="314325"/>
           </a:xfrm>
           <a:prstGeom prst="rect">
             <a:avLst/>
@@ -4799,7 +4799,7 @@
           <a:p>
             <a:pPr algn="l"/>
             <a:r>
-              <a:rPr sz="1800" i="0" b="0">
+              <a:rPr sz="2100" i="0" b="0">
                 <a:solidFill>
                   <a:srgbClr val="2D5BE3"/>
                 </a:solidFill>
@@ -4820,8 +4820,8 @@
         </p:nvSpPr>
         <p:spPr>
           <a:xfrm>
-            <a:off x="1468041" y="17249775"/>
-            <a:ext cx="7350919" cy="180975"/>
+            <a:off x="814626" y="17221200"/>
+            <a:ext cx="8657749" cy="209550"/>
           </a:xfrm>
           <a:prstGeom prst="rect">
             <a:avLst/>
@@ -4834,7 +4834,7 @@
           <a:p>
             <a:pPr algn="ctr"/>
             <a:r>
-              <a:rPr sz="1200" i="0" b="0" spc="384">
+              <a:rPr sz="1425" i="0" b="0" spc="456">
                 <a:solidFill>
                   <a:srgbClr val="8A8F99"/>
                 </a:solidFill>
